--- a/mon/toan/slide/lop12/Slide_TOAN12_Bai4_T14-18.pptx
+++ b/mon/toan/slide/lop12/Slide_TOAN12_Bai4_T14-18.pptx
@@ -6607,7 +6607,7 @@
                 </a:solidFill>
                 <a:latin typeface="Calibri"/>
               </a:rPr>
-              <a:t>GV soạn: Trương Tử Trang – Trường THPT Vĩnh Thạnh</a:t>
+              <a:t>GV soạn: TTT – Trường THPT</a:t>
             </a:r>
           </a:p>
         </p:txBody>
@@ -40813,7 +40813,7 @@
                 </a:solidFill>
                 <a:latin typeface="Arial"/>
               </a:rPr>
-              <a:t>VẬN DỤNG – MÔ HÌNH HÓA TẠI VĨNH THẠNH</a:t>
+              <a:t>VẬN DỤNG – MÔ HÌNH HÓA TẠI ĐỊA PHƯƠNG</a:t>
             </a:r>
           </a:p>
         </p:txBody>
@@ -42194,50 +42194,6 @@
       <p:grpSpPr/>
       <p:sp>
         <p:nvSpPr>
-          <p:cNvPr id="2" name="Rectangle 1"/>
-          <p:cNvSpPr/>
-          <p:nvPr/>
-        </p:nvSpPr>
-        <p:spPr>
-          <a:xfrm>
-            <a:off x="457200" y="384048"/>
-            <a:ext cx="109728" cy="658368"/>
-          </a:xfrm>
-          <a:prstGeom prst="rect">
-            <a:avLst/>
-          </a:prstGeom>
-          <a:solidFill>
-            <a:srgbClr val="1E40AF"/>
-          </a:solidFill>
-          <a:ln>
-            <a:noFill/>
-          </a:ln>
-          <a:effectLst/>
-        </p:spPr>
-        <p:style>
-          <a:lnRef idx="1">
-            <a:schemeClr val="accent1"/>
-          </a:lnRef>
-          <a:fillRef idx="3">
-            <a:schemeClr val="accent1"/>
-          </a:fillRef>
-          <a:effectRef idx="2">
-            <a:schemeClr val="accent1"/>
-          </a:effectRef>
-          <a:fontRef idx="minor">
-            <a:schemeClr val="lt1"/>
-          </a:fontRef>
-        </p:style>
-        <p:txBody>
-          <a:bodyPr rtlCol="0" anchor="ctr"/>
-          <a:lstStyle/>
-          <a:p>
-            <a:pPr algn="ctr"/>
-          </a:p>
-        </p:txBody>
-      </p:sp>
-      <p:sp>
-        <p:nvSpPr>
           <p:cNvPr id="3" name="TextBox 2"/>
           <p:cNvSpPr txBox="1"/>
           <p:nvPr/>
@@ -42349,65 +42305,1805 @@
           </a:p>
         </p:txBody>
       </p:sp>
-      <p:pic>
-        <p:nvPicPr>
-          <p:cNvPr id="6" name="Picture 5" descr="img02.png"/>
-          <p:cNvPicPr>
-            <a:picLocks noChangeAspect="1"/>
-          </p:cNvPicPr>
+      <p:cxnSp>
+        <p:nvCxnSpPr>
+          <p:cNvPr id="6" name="Connector 5"/>
+          <p:cNvCxnSpPr/>
           <p:nvPr/>
-        </p:nvPicPr>
-        <p:blipFill>
-          <a:blip r:embed="rId2"/>
-          <a:stretch>
-            <a:fillRect/>
-          </a:stretch>
-        </p:blipFill>
+        </p:nvCxnSpPr>
+        <p:spPr>
+          <a:xfrm flipH="1" flipV="1">
+            <a:off x="4338888" y="2670962"/>
+            <a:ext cx="1688379" cy="1283818"/>
+          </a:xfrm>
+          <a:prstGeom prst="line">
+            <a:avLst/>
+          </a:prstGeom>
+          <a:ln w="44450">
+            <a:solidFill>
+              <a:srgbClr val="548235"/>
+            </a:solidFill>
+          </a:ln>
+        </p:spPr>
+        <p:style>
+          <a:lnRef idx="2">
+            <a:schemeClr val="accent1"/>
+          </a:lnRef>
+          <a:fillRef idx="0">
+            <a:schemeClr val="accent1"/>
+          </a:fillRef>
+          <a:effectRef idx="1">
+            <a:schemeClr val="accent1"/>
+          </a:effectRef>
+          <a:fontRef idx="minor">
+            <a:schemeClr val="tx1"/>
+          </a:fontRef>
+        </p:style>
+      </p:cxnSp>
+      <p:cxnSp>
+        <p:nvCxnSpPr>
+          <p:cNvPr id="7" name="Connector 6"/>
+          <p:cNvCxnSpPr/>
+          <p:nvPr/>
+        </p:nvCxnSpPr>
+        <p:spPr>
+          <a:xfrm flipH="1" flipV="1">
+            <a:off x="2077961" y="1729694"/>
+            <a:ext cx="2260927" cy="941268"/>
+          </a:xfrm>
+          <a:prstGeom prst="line">
+            <a:avLst/>
+          </a:prstGeom>
+          <a:ln w="15875">
+            <a:solidFill>
+              <a:srgbClr val="548235"/>
+            </a:solidFill>
+          </a:ln>
+        </p:spPr>
+        <p:style>
+          <a:lnRef idx="2">
+            <a:schemeClr val="accent1"/>
+          </a:lnRef>
+          <a:fillRef idx="0">
+            <a:schemeClr val="accent1"/>
+          </a:fillRef>
+          <a:effectRef idx="1">
+            <a:schemeClr val="accent1"/>
+          </a:effectRef>
+          <a:fontRef idx="minor">
+            <a:schemeClr val="tx1"/>
+          </a:fontRef>
+        </p:style>
+      </p:cxnSp>
+      <p:sp>
+        <p:nvSpPr>
+          <p:cNvPr id="8" name="Rounded Rectangle 7"/>
+          <p:cNvSpPr/>
+          <p:nvPr/>
+        </p:nvSpPr>
         <p:spPr>
           <a:xfrm>
-            <a:off x="2193266" y="1417320"/>
-            <a:ext cx="7774988" cy="4343400"/>
+            <a:off x="1534680" y="1554093"/>
+            <a:ext cx="543281" cy="351200"/>
           </a:xfrm>
-          <a:prstGeom prst="rect">
-            <a:avLst/>
+          <a:prstGeom prst="roundRect">
+            <a:avLst>
+              <a:gd name="adj" fmla="val 50000"/>
+            </a:avLst>
           </a:prstGeom>
+          <a:solidFill>
+            <a:srgbClr val="EDF5E8"/>
+          </a:solidFill>
+          <a:ln w="15875">
+            <a:solidFill>
+              <a:srgbClr val="548235"/>
+            </a:solidFill>
+          </a:ln>
+          <a:effectLst/>
         </p:spPr>
-      </p:pic>
-      <p:sp>
-        <p:nvSpPr>
-          <p:cNvPr id="7" name="TextBox 6"/>
-          <p:cNvSpPr txBox="1"/>
-          <p:nvPr/>
-        </p:nvSpPr>
-        <p:spPr>
-          <a:xfrm>
-            <a:off x="731520" y="5806440"/>
-            <a:ext cx="10698480" cy="457200"/>
-          </a:xfrm>
-          <a:prstGeom prst="rect">
-            <a:avLst/>
-          </a:prstGeom>
-          <a:noFill/>
-        </p:spPr>
+        <p:style>
+          <a:lnRef idx="1">
+            <a:schemeClr val="accent1"/>
+          </a:lnRef>
+          <a:fillRef idx="3">
+            <a:schemeClr val="accent1"/>
+          </a:fillRef>
+          <a:effectRef idx="2">
+            <a:schemeClr val="accent1"/>
+          </a:effectRef>
+          <a:fontRef idx="minor">
+            <a:schemeClr val="lt1"/>
+          </a:fontRef>
+        </p:style>
         <p:txBody>
-          <a:bodyPr wrap="square" anchor="t" lIns="45720" rIns="45720">
-            <a:spAutoFit/>
-          </a:bodyPr>
+          <a:bodyPr rtlCol="0" anchor="ctr" wrap="none" lIns="64000" rIns="64000" tIns="25400" bIns="25400"/>
           <a:lstStyle/>
           <a:p>
-            <a:pPr algn="ctr">
-              <a:spcAft>
-                <a:spcPts val="800"/>
-              </a:spcAft>
-            </a:pPr>
+            <a:pPr algn="ctr"/>
             <a:r>
-              <a:rPr sz="2000" b="1">
+              <a:rPr sz="1300" b="0">
                 <a:solidFill>
-                  <a:srgbClr val="1E40AF"/>
+                  <a:srgbClr val="000000"/>
                 </a:solidFill>
                 <a:latin typeface="Calibri"/>
               </a:rPr>
-              <a:t>Nêu nội dung từng nhánh trước khi GV hiện đáp án đầy đủ</a:t>
+              <a:t>TXĐ</a:t>
+            </a:r>
+          </a:p>
+        </p:txBody>
+      </p:sp>
+      <p:cxnSp>
+        <p:nvCxnSpPr>
+          <p:cNvPr id="9" name="Connector 8"/>
+          <p:cNvCxnSpPr/>
+          <p:nvPr/>
+        </p:nvCxnSpPr>
+        <p:spPr>
+          <a:xfrm flipH="1" flipV="1">
+            <a:off x="2807703" y="2256495"/>
+            <a:ext cx="1531185" cy="414467"/>
+          </a:xfrm>
+          <a:prstGeom prst="line">
+            <a:avLst/>
+          </a:prstGeom>
+          <a:ln w="15875">
+            <a:solidFill>
+              <a:srgbClr val="548235"/>
+            </a:solidFill>
+          </a:ln>
+        </p:spPr>
+        <p:style>
+          <a:lnRef idx="2">
+            <a:schemeClr val="accent1"/>
+          </a:lnRef>
+          <a:fillRef idx="0">
+            <a:schemeClr val="accent1"/>
+          </a:fillRef>
+          <a:effectRef idx="1">
+            <a:schemeClr val="accent1"/>
+          </a:effectRef>
+          <a:fontRef idx="minor">
+            <a:schemeClr val="tx1"/>
+          </a:fontRef>
+        </p:style>
+      </p:cxnSp>
+      <p:sp>
+        <p:nvSpPr>
+          <p:cNvPr id="10" name="Rounded Rectangle 9"/>
+          <p:cNvSpPr/>
+          <p:nvPr/>
+        </p:nvSpPr>
+        <p:spPr>
+          <a:xfrm>
+            <a:off x="804938" y="1980183"/>
+            <a:ext cx="2002765" cy="552622"/>
+          </a:xfrm>
+          <a:prstGeom prst="roundRect">
+            <a:avLst>
+              <a:gd name="adj" fmla="val 50000"/>
+            </a:avLst>
+          </a:prstGeom>
+          <a:solidFill>
+            <a:srgbClr val="EDF5E8"/>
+          </a:solidFill>
+          <a:ln w="15875">
+            <a:solidFill>
+              <a:srgbClr val="548235"/>
+            </a:solidFill>
+          </a:ln>
+          <a:effectLst/>
+        </p:spPr>
+        <p:style>
+          <a:lnRef idx="1">
+            <a:schemeClr val="accent1"/>
+          </a:lnRef>
+          <a:fillRef idx="3">
+            <a:schemeClr val="accent1"/>
+          </a:fillRef>
+          <a:effectRef idx="2">
+            <a:schemeClr val="accent1"/>
+          </a:effectRef>
+          <a:fontRef idx="minor">
+            <a:schemeClr val="lt1"/>
+          </a:fontRef>
+        </p:style>
+        <p:txBody>
+          <a:bodyPr rtlCol="0" anchor="ctr" wrap="none" lIns="64000" rIns="64000" tIns="25400" bIns="25400"/>
+          <a:lstStyle/>
+          <a:p>
+            <a:pPr algn="ctr"/>
+            <a:r>
+              <a:rPr sz="1300" b="0">
+                <a:solidFill>
+                  <a:srgbClr val="000000"/>
+                </a:solidFill>
+                <a:latin typeface="Calibri"/>
+              </a:rPr>
+              <a:t>y': khoảng đơn điệu,</a:t>
+            </a:r>
+          </a:p>
+          <a:p>
+            <a:pPr algn="ctr"/>
+            <a:r>
+              <a:rPr sz="1300" b="0">
+                <a:solidFill>
+                  <a:srgbClr val="000000"/>
+                </a:solidFill>
+                <a:latin typeface="Calibri"/>
+              </a:rPr>
+              <a:t>cực trị</a:t>
+            </a:r>
+          </a:p>
+        </p:txBody>
+      </p:sp>
+      <p:cxnSp>
+        <p:nvCxnSpPr>
+          <p:cNvPr id="11" name="Connector 10"/>
+          <p:cNvCxnSpPr/>
+          <p:nvPr/>
+        </p:nvCxnSpPr>
+        <p:spPr>
+          <a:xfrm flipH="1">
+            <a:off x="2593073" y="2670962"/>
+            <a:ext cx="1745815" cy="213045"/>
+          </a:xfrm>
+          <a:prstGeom prst="line">
+            <a:avLst/>
+          </a:prstGeom>
+          <a:ln w="15875">
+            <a:solidFill>
+              <a:srgbClr val="548235"/>
+            </a:solidFill>
+          </a:ln>
+        </p:spPr>
+        <p:style>
+          <a:lnRef idx="2">
+            <a:schemeClr val="accent1"/>
+          </a:lnRef>
+          <a:fillRef idx="0">
+            <a:schemeClr val="accent1"/>
+          </a:fillRef>
+          <a:effectRef idx="1">
+            <a:schemeClr val="accent1"/>
+          </a:effectRef>
+          <a:fontRef idx="minor">
+            <a:schemeClr val="tx1"/>
+          </a:fontRef>
+        </p:style>
+      </p:cxnSp>
+      <p:sp>
+        <p:nvSpPr>
+          <p:cNvPr id="12" name="Rounded Rectangle 11"/>
+          <p:cNvSpPr/>
+          <p:nvPr/>
+        </p:nvSpPr>
+        <p:spPr>
+          <a:xfrm>
+            <a:off x="1019568" y="2607696"/>
+            <a:ext cx="1573505" cy="552622"/>
+          </a:xfrm>
+          <a:prstGeom prst="roundRect">
+            <a:avLst>
+              <a:gd name="adj" fmla="val 50000"/>
+            </a:avLst>
+          </a:prstGeom>
+          <a:solidFill>
+            <a:srgbClr val="EDF5E8"/>
+          </a:solidFill>
+          <a:ln w="15875">
+            <a:solidFill>
+              <a:srgbClr val="548235"/>
+            </a:solidFill>
+          </a:ln>
+          <a:effectLst/>
+        </p:spPr>
+        <p:style>
+          <a:lnRef idx="1">
+            <a:schemeClr val="accent1"/>
+          </a:lnRef>
+          <a:fillRef idx="3">
+            <a:schemeClr val="accent1"/>
+          </a:fillRef>
+          <a:effectRef idx="2">
+            <a:schemeClr val="accent1"/>
+          </a:effectRef>
+          <a:fontRef idx="minor">
+            <a:schemeClr val="lt1"/>
+          </a:fontRef>
+        </p:style>
+        <p:txBody>
+          <a:bodyPr rtlCol="0" anchor="ctr" wrap="none" lIns="64000" rIns="64000" tIns="25400" bIns="25400"/>
+          <a:lstStyle/>
+          <a:p>
+            <a:pPr algn="ctr"/>
+            <a:r>
+              <a:rPr sz="1300" b="0">
+                <a:solidFill>
+                  <a:srgbClr val="000000"/>
+                </a:solidFill>
+                <a:latin typeface="Calibri"/>
+              </a:rPr>
+              <a:t>Giới hạn &amp; tiệm</a:t>
+            </a:r>
+          </a:p>
+          <a:p>
+            <a:pPr algn="ctr"/>
+            <a:r>
+              <a:rPr sz="1300" b="0">
+                <a:solidFill>
+                  <a:srgbClr val="000000"/>
+                </a:solidFill>
+                <a:latin typeface="Calibri"/>
+              </a:rPr>
+              <a:t>cận</a:t>
+            </a:r>
+          </a:p>
+        </p:txBody>
+      </p:sp>
+      <p:cxnSp>
+        <p:nvCxnSpPr>
+          <p:cNvPr id="13" name="Connector 12"/>
+          <p:cNvCxnSpPr/>
+          <p:nvPr/>
+        </p:nvCxnSpPr>
+        <p:spPr>
+          <a:xfrm flipH="1">
+            <a:off x="2378443" y="2670962"/>
+            <a:ext cx="1960445" cy="840557"/>
+          </a:xfrm>
+          <a:prstGeom prst="line">
+            <a:avLst/>
+          </a:prstGeom>
+          <a:ln w="15875">
+            <a:solidFill>
+              <a:srgbClr val="548235"/>
+            </a:solidFill>
+          </a:ln>
+        </p:spPr>
+        <p:style>
+          <a:lnRef idx="2">
+            <a:schemeClr val="accent1"/>
+          </a:lnRef>
+          <a:fillRef idx="0">
+            <a:schemeClr val="accent1"/>
+          </a:fillRef>
+          <a:effectRef idx="1">
+            <a:schemeClr val="accent1"/>
+          </a:effectRef>
+          <a:fontRef idx="minor">
+            <a:schemeClr val="tx1"/>
+          </a:fontRef>
+        </p:style>
+      </p:cxnSp>
+      <p:sp>
+        <p:nvSpPr>
+          <p:cNvPr id="14" name="Rounded Rectangle 13"/>
+          <p:cNvSpPr/>
+          <p:nvPr/>
+        </p:nvSpPr>
+        <p:spPr>
+          <a:xfrm>
+            <a:off x="1234198" y="3235208"/>
+            <a:ext cx="1144245" cy="552622"/>
+          </a:xfrm>
+          <a:prstGeom prst="roundRect">
+            <a:avLst>
+              <a:gd name="adj" fmla="val 50000"/>
+            </a:avLst>
+          </a:prstGeom>
+          <a:solidFill>
+            <a:srgbClr val="EDF5E8"/>
+          </a:solidFill>
+          <a:ln w="15875">
+            <a:solidFill>
+              <a:srgbClr val="548235"/>
+            </a:solidFill>
+          </a:ln>
+          <a:effectLst/>
+        </p:spPr>
+        <p:style>
+          <a:lnRef idx="1">
+            <a:schemeClr val="accent1"/>
+          </a:lnRef>
+          <a:fillRef idx="3">
+            <a:schemeClr val="accent1"/>
+          </a:fillRef>
+          <a:effectRef idx="2">
+            <a:schemeClr val="accent1"/>
+          </a:effectRef>
+          <a:fontRef idx="minor">
+            <a:schemeClr val="lt1"/>
+          </a:fontRef>
+        </p:style>
+        <p:txBody>
+          <a:bodyPr rtlCol="0" anchor="ctr" wrap="none" lIns="64000" rIns="64000" tIns="25400" bIns="25400"/>
+          <a:lstStyle/>
+          <a:p>
+            <a:pPr algn="ctr"/>
+            <a:r>
+              <a:rPr sz="1300" b="0">
+                <a:solidFill>
+                  <a:srgbClr val="000000"/>
+                </a:solidFill>
+                <a:latin typeface="Calibri"/>
+              </a:rPr>
+              <a:t>BBT · ⑤ Vẽ</a:t>
+            </a:r>
+          </a:p>
+          <a:p>
+            <a:pPr algn="ctr"/>
+            <a:r>
+              <a:rPr sz="1300" b="0">
+                <a:solidFill>
+                  <a:srgbClr val="000000"/>
+                </a:solidFill>
+                <a:latin typeface="Calibri"/>
+              </a:rPr>
+              <a:t>đồ thị</a:t>
+            </a:r>
+          </a:p>
+        </p:txBody>
+      </p:sp>
+      <p:sp>
+        <p:nvSpPr>
+          <p:cNvPr id="15" name="Oval 14"/>
+          <p:cNvSpPr/>
+          <p:nvPr/>
+        </p:nvSpPr>
+        <p:spPr>
+          <a:xfrm>
+            <a:off x="3294580" y="2259078"/>
+            <a:ext cx="2088617" cy="823767"/>
+          </a:xfrm>
+          <a:prstGeom prst="ellipse">
+            <a:avLst/>
+          </a:prstGeom>
+          <a:solidFill>
+            <a:srgbClr val="E2EFDA"/>
+          </a:solidFill>
+          <a:ln w="31750">
+            <a:solidFill>
+              <a:srgbClr val="375623"/>
+            </a:solidFill>
+          </a:ln>
+          <a:effectLst/>
+        </p:spPr>
+        <p:style>
+          <a:lnRef idx="1">
+            <a:schemeClr val="accent1"/>
+          </a:lnRef>
+          <a:fillRef idx="3">
+            <a:schemeClr val="accent1"/>
+          </a:fillRef>
+          <a:effectRef idx="2">
+            <a:schemeClr val="accent1"/>
+          </a:effectRef>
+          <a:fontRef idx="minor">
+            <a:schemeClr val="lt1"/>
+          </a:fontRef>
+        </p:style>
+        <p:txBody>
+          <a:bodyPr rtlCol="0" anchor="ctr" wrap="none" lIns="64000" rIns="64000" tIns="25400" bIns="25400"/>
+          <a:lstStyle/>
+          <a:p>
+            <a:pPr algn="ctr"/>
+            <a:r>
+              <a:rPr sz="1500" b="1">
+                <a:solidFill>
+                  <a:srgbClr val="000000"/>
+                </a:solidFill>
+                <a:latin typeface="Calibri"/>
+              </a:rPr>
+              <a:t>Sơ đồ 5</a:t>
+            </a:r>
+          </a:p>
+          <a:p>
+            <a:pPr algn="ctr"/>
+            <a:r>
+              <a:rPr sz="1500" b="1">
+                <a:solidFill>
+                  <a:srgbClr val="000000"/>
+                </a:solidFill>
+                <a:latin typeface="Calibri"/>
+              </a:rPr>
+              <a:t>bước khảo sát</a:t>
+            </a:r>
+          </a:p>
+        </p:txBody>
+      </p:sp>
+      <p:cxnSp>
+        <p:nvCxnSpPr>
+          <p:cNvPr id="16" name="Connector 15"/>
+          <p:cNvCxnSpPr/>
+          <p:nvPr/>
+        </p:nvCxnSpPr>
+        <p:spPr>
+          <a:xfrm flipV="1">
+            <a:off x="6027267" y="2670962"/>
+            <a:ext cx="1688379" cy="1283818"/>
+          </a:xfrm>
+          <a:prstGeom prst="line">
+            <a:avLst/>
+          </a:prstGeom>
+          <a:ln w="44450">
+            <a:solidFill>
+              <a:srgbClr val="BF8F00"/>
+            </a:solidFill>
+          </a:ln>
+        </p:spPr>
+        <p:style>
+          <a:lnRef idx="2">
+            <a:schemeClr val="accent1"/>
+          </a:lnRef>
+          <a:fillRef idx="0">
+            <a:schemeClr val="accent1"/>
+          </a:fillRef>
+          <a:effectRef idx="1">
+            <a:schemeClr val="accent1"/>
+          </a:effectRef>
+          <a:fontRef idx="minor">
+            <a:schemeClr val="tx1"/>
+          </a:fontRef>
+        </p:style>
+      </p:cxnSp>
+      <p:cxnSp>
+        <p:nvCxnSpPr>
+          <p:cNvPr id="17" name="Connector 16"/>
+          <p:cNvCxnSpPr/>
+          <p:nvPr/>
+        </p:nvCxnSpPr>
+        <p:spPr>
+          <a:xfrm flipV="1">
+            <a:off x="7715646" y="2043450"/>
+            <a:ext cx="2003371" cy="627512"/>
+          </a:xfrm>
+          <a:prstGeom prst="line">
+            <a:avLst/>
+          </a:prstGeom>
+          <a:ln w="15875">
+            <a:solidFill>
+              <a:srgbClr val="BF8F00"/>
+            </a:solidFill>
+          </a:ln>
+        </p:spPr>
+        <p:style>
+          <a:lnRef idx="2">
+            <a:schemeClr val="accent1"/>
+          </a:lnRef>
+          <a:fillRef idx="0">
+            <a:schemeClr val="accent1"/>
+          </a:fillRef>
+          <a:effectRef idx="1">
+            <a:schemeClr val="accent1"/>
+          </a:effectRef>
+          <a:fontRef idx="minor">
+            <a:schemeClr val="tx1"/>
+          </a:fontRef>
+        </p:style>
+      </p:cxnSp>
+      <p:sp>
+        <p:nvSpPr>
+          <p:cNvPr id="18" name="Rounded Rectangle 17"/>
+          <p:cNvSpPr/>
+          <p:nvPr/>
+        </p:nvSpPr>
+        <p:spPr>
+          <a:xfrm>
+            <a:off x="9719017" y="1767138"/>
+            <a:ext cx="1058393" cy="552622"/>
+          </a:xfrm>
+          <a:prstGeom prst="roundRect">
+            <a:avLst>
+              <a:gd name="adj" fmla="val 50000"/>
+            </a:avLst>
+          </a:prstGeom>
+          <a:solidFill>
+            <a:srgbClr val="FFF8E1"/>
+          </a:solidFill>
+          <a:ln w="15875">
+            <a:solidFill>
+              <a:srgbClr val="BF8F00"/>
+            </a:solidFill>
+          </a:ln>
+          <a:effectLst/>
+        </p:spPr>
+        <p:style>
+          <a:lnRef idx="1">
+            <a:schemeClr val="accent1"/>
+          </a:lnRef>
+          <a:fillRef idx="3">
+            <a:schemeClr val="accent1"/>
+          </a:fillRef>
+          <a:effectRef idx="2">
+            <a:schemeClr val="accent1"/>
+          </a:effectRef>
+          <a:fontRef idx="minor">
+            <a:schemeClr val="lt1"/>
+          </a:fontRef>
+        </p:style>
+        <p:txBody>
+          <a:bodyPr rtlCol="0" anchor="ctr" wrap="none" lIns="64000" rIns="64000" tIns="25400" bIns="25400"/>
+          <a:lstStyle/>
+          <a:p>
+            <a:pPr algn="ctr"/>
+            <a:r>
+              <a:rPr sz="1300" b="0">
+                <a:solidFill>
+                  <a:srgbClr val="000000"/>
+                </a:solidFill>
+                <a:latin typeface="Calibri"/>
+              </a:rPr>
+              <a:t>Δ' &gt; 0 →</a:t>
+            </a:r>
+          </a:p>
+          <a:p>
+            <a:pPr algn="ctr"/>
+            <a:r>
+              <a:rPr sz="1300" b="0">
+                <a:solidFill>
+                  <a:srgbClr val="000000"/>
+                </a:solidFill>
+                <a:latin typeface="Calibri"/>
+              </a:rPr>
+              <a:t>2 cực trị</a:t>
+            </a:r>
+          </a:p>
+        </p:txBody>
+      </p:sp>
+      <p:cxnSp>
+        <p:nvCxnSpPr>
+          <p:cNvPr id="19" name="Connector 18"/>
+          <p:cNvCxnSpPr/>
+          <p:nvPr/>
+        </p:nvCxnSpPr>
+        <p:spPr>
+          <a:xfrm>
+            <a:off x="7715646" y="2670962"/>
+            <a:ext cx="1831667" cy="0"/>
+          </a:xfrm>
+          <a:prstGeom prst="line">
+            <a:avLst/>
+          </a:prstGeom>
+          <a:ln w="15875">
+            <a:solidFill>
+              <a:srgbClr val="BF8F00"/>
+            </a:solidFill>
+          </a:ln>
+        </p:spPr>
+        <p:style>
+          <a:lnRef idx="2">
+            <a:schemeClr val="accent1"/>
+          </a:lnRef>
+          <a:fillRef idx="0">
+            <a:schemeClr val="accent1"/>
+          </a:fillRef>
+          <a:effectRef idx="1">
+            <a:schemeClr val="accent1"/>
+          </a:effectRef>
+          <a:fontRef idx="minor">
+            <a:schemeClr val="tx1"/>
+          </a:fontRef>
+        </p:style>
+      </p:cxnSp>
+      <p:sp>
+        <p:nvSpPr>
+          <p:cNvPr id="20" name="Rounded Rectangle 19"/>
+          <p:cNvSpPr/>
+          <p:nvPr/>
+        </p:nvSpPr>
+        <p:spPr>
+          <a:xfrm>
+            <a:off x="9547313" y="2394651"/>
+            <a:ext cx="1401801" cy="552622"/>
+          </a:xfrm>
+          <a:prstGeom prst="roundRect">
+            <a:avLst>
+              <a:gd name="adj" fmla="val 50000"/>
+            </a:avLst>
+          </a:prstGeom>
+          <a:solidFill>
+            <a:srgbClr val="FFF8E1"/>
+          </a:solidFill>
+          <a:ln w="15875">
+            <a:solidFill>
+              <a:srgbClr val="BF8F00"/>
+            </a:solidFill>
+          </a:ln>
+          <a:effectLst/>
+        </p:spPr>
+        <p:style>
+          <a:lnRef idx="1">
+            <a:schemeClr val="accent1"/>
+          </a:lnRef>
+          <a:fillRef idx="3">
+            <a:schemeClr val="accent1"/>
+          </a:fillRef>
+          <a:effectRef idx="2">
+            <a:schemeClr val="accent1"/>
+          </a:effectRef>
+          <a:fontRef idx="minor">
+            <a:schemeClr val="lt1"/>
+          </a:fontRef>
+        </p:style>
+        <p:txBody>
+          <a:bodyPr rtlCol="0" anchor="ctr" wrap="none" lIns="64000" rIns="64000" tIns="25400" bIns="25400"/>
+          <a:lstStyle/>
+          <a:p>
+            <a:pPr algn="ctr"/>
+            <a:r>
+              <a:rPr sz="1300" b="0">
+                <a:solidFill>
+                  <a:srgbClr val="000000"/>
+                </a:solidFill>
+                <a:latin typeface="Calibri"/>
+              </a:rPr>
+              <a:t>Δ' ≤ 0 →</a:t>
+            </a:r>
+          </a:p>
+          <a:p>
+            <a:pPr algn="ctr"/>
+            <a:r>
+              <a:rPr sz="1300" b="0">
+                <a:solidFill>
+                  <a:srgbClr val="000000"/>
+                </a:solidFill>
+                <a:latin typeface="Calibri"/>
+              </a:rPr>
+              <a:t>không cực trị</a:t>
+            </a:r>
+          </a:p>
+        </p:txBody>
+      </p:sp>
+      <p:cxnSp>
+        <p:nvCxnSpPr>
+          <p:cNvPr id="21" name="Connector 20"/>
+          <p:cNvCxnSpPr/>
+          <p:nvPr/>
+        </p:nvCxnSpPr>
+        <p:spPr>
+          <a:xfrm>
+            <a:off x="7715646" y="2670962"/>
+            <a:ext cx="1574111" cy="627512"/>
+          </a:xfrm>
+          <a:prstGeom prst="line">
+            <a:avLst/>
+          </a:prstGeom>
+          <a:ln w="15875">
+            <a:solidFill>
+              <a:srgbClr val="BF8F00"/>
+            </a:solidFill>
+          </a:ln>
+        </p:spPr>
+        <p:style>
+          <a:lnRef idx="2">
+            <a:schemeClr val="accent1"/>
+          </a:lnRef>
+          <a:fillRef idx="0">
+            <a:schemeClr val="accent1"/>
+          </a:fillRef>
+          <a:effectRef idx="1">
+            <a:schemeClr val="accent1"/>
+          </a:effectRef>
+          <a:fontRef idx="minor">
+            <a:schemeClr val="tx1"/>
+          </a:fontRef>
+        </p:style>
+      </p:cxnSp>
+      <p:sp>
+        <p:nvSpPr>
+          <p:cNvPr id="22" name="Rounded Rectangle 21"/>
+          <p:cNvSpPr/>
+          <p:nvPr/>
+        </p:nvSpPr>
+        <p:spPr>
+          <a:xfrm>
+            <a:off x="9289757" y="3022163"/>
+            <a:ext cx="1916913" cy="552622"/>
+          </a:xfrm>
+          <a:prstGeom prst="roundRect">
+            <a:avLst>
+              <a:gd name="adj" fmla="val 50000"/>
+            </a:avLst>
+          </a:prstGeom>
+          <a:solidFill>
+            <a:srgbClr val="FFF8E1"/>
+          </a:solidFill>
+          <a:ln w="15875">
+            <a:solidFill>
+              <a:srgbClr val="BF8F00"/>
+            </a:solidFill>
+          </a:ln>
+          <a:effectLst/>
+        </p:spPr>
+        <p:style>
+          <a:lnRef idx="1">
+            <a:schemeClr val="accent1"/>
+          </a:lnRef>
+          <a:fillRef idx="3">
+            <a:schemeClr val="accent1"/>
+          </a:fillRef>
+          <a:effectRef idx="2">
+            <a:schemeClr val="accent1"/>
+          </a:effectRef>
+          <a:fontRef idx="minor">
+            <a:schemeClr val="lt1"/>
+          </a:fontRef>
+        </p:style>
+        <p:txBody>
+          <a:bodyPr rtlCol="0" anchor="ctr" wrap="none" lIns="64000" rIns="64000" tIns="25400" bIns="25400"/>
+          <a:lstStyle/>
+          <a:p>
+            <a:pPr algn="ctr"/>
+            <a:r>
+              <a:rPr sz="1300" b="0">
+                <a:solidFill>
+                  <a:srgbClr val="000000"/>
+                </a:solidFill>
+                <a:latin typeface="Calibri"/>
+              </a:rPr>
+              <a:t>Tâm đối xứng I(x_I;</a:t>
+            </a:r>
+          </a:p>
+          <a:p>
+            <a:pPr algn="ctr"/>
+            <a:r>
+              <a:rPr sz="1300" b="0">
+                <a:solidFill>
+                  <a:srgbClr val="000000"/>
+                </a:solidFill>
+                <a:latin typeface="Calibri"/>
+              </a:rPr>
+              <a:t>y_I)</a:t>
+            </a:r>
+          </a:p>
+        </p:txBody>
+      </p:sp>
+      <p:sp>
+        <p:nvSpPr>
+          <p:cNvPr id="23" name="Oval 22"/>
+          <p:cNvSpPr/>
+          <p:nvPr/>
+        </p:nvSpPr>
+        <p:spPr>
+          <a:xfrm>
+            <a:off x="6463311" y="2259078"/>
+            <a:ext cx="2504669" cy="823767"/>
+          </a:xfrm>
+          <a:prstGeom prst="ellipse">
+            <a:avLst/>
+          </a:prstGeom>
+          <a:solidFill>
+            <a:srgbClr val="FFF2CC"/>
+          </a:solidFill>
+          <a:ln w="31750">
+            <a:solidFill>
+              <a:srgbClr val="BF8F00"/>
+            </a:solidFill>
+          </a:ln>
+          <a:effectLst/>
+        </p:spPr>
+        <p:style>
+          <a:lnRef idx="1">
+            <a:schemeClr val="accent1"/>
+          </a:lnRef>
+          <a:fillRef idx="3">
+            <a:schemeClr val="accent1"/>
+          </a:fillRef>
+          <a:effectRef idx="2">
+            <a:schemeClr val="accent1"/>
+          </a:effectRef>
+          <a:fontRef idx="minor">
+            <a:schemeClr val="lt1"/>
+          </a:fontRef>
+        </p:style>
+        <p:txBody>
+          <a:bodyPr rtlCol="0" anchor="ctr" wrap="none" lIns="64000" rIns="64000" tIns="25400" bIns="25400"/>
+          <a:lstStyle/>
+          <a:p>
+            <a:pPr algn="ctr"/>
+            <a:r>
+              <a:rPr sz="1500" b="1">
+                <a:solidFill>
+                  <a:srgbClr val="000000"/>
+                </a:solidFill>
+                <a:latin typeface="Calibri"/>
+              </a:rPr>
+              <a:t>Hàm bậc ba</a:t>
+            </a:r>
+          </a:p>
+          <a:p>
+            <a:pPr algn="ctr"/>
+            <a:r>
+              <a:rPr sz="1500" b="1">
+                <a:solidFill>
+                  <a:srgbClr val="000000"/>
+                </a:solidFill>
+                <a:latin typeface="Calibri"/>
+              </a:rPr>
+              <a:t>y = ax³+bx²+cx+d</a:t>
+            </a:r>
+          </a:p>
+        </p:txBody>
+      </p:sp>
+      <p:cxnSp>
+        <p:nvCxnSpPr>
+          <p:cNvPr id="24" name="Connector 23"/>
+          <p:cNvCxnSpPr/>
+          <p:nvPr/>
+        </p:nvCxnSpPr>
+        <p:spPr>
+          <a:xfrm flipH="1">
+            <a:off x="4338888" y="3954780"/>
+            <a:ext cx="1688379" cy="1283817"/>
+          </a:xfrm>
+          <a:prstGeom prst="line">
+            <a:avLst/>
+          </a:prstGeom>
+          <a:ln w="44450">
+            <a:solidFill>
+              <a:srgbClr val="2F5597"/>
+            </a:solidFill>
+          </a:ln>
+        </p:spPr>
+        <p:style>
+          <a:lnRef idx="2">
+            <a:schemeClr val="accent1"/>
+          </a:lnRef>
+          <a:fillRef idx="0">
+            <a:schemeClr val="accent1"/>
+          </a:fillRef>
+          <a:effectRef idx="1">
+            <a:schemeClr val="accent1"/>
+          </a:effectRef>
+          <a:fontRef idx="minor">
+            <a:schemeClr val="tx1"/>
+          </a:fontRef>
+        </p:style>
+      </p:cxnSp>
+      <p:cxnSp>
+        <p:nvCxnSpPr>
+          <p:cNvPr id="25" name="Connector 24"/>
+          <p:cNvCxnSpPr/>
+          <p:nvPr/>
+        </p:nvCxnSpPr>
+        <p:spPr>
+          <a:xfrm flipH="1" flipV="1">
+            <a:off x="2464295" y="4711796"/>
+            <a:ext cx="1874593" cy="526801"/>
+          </a:xfrm>
+          <a:prstGeom prst="line">
+            <a:avLst/>
+          </a:prstGeom>
+          <a:ln w="15875">
+            <a:solidFill>
+              <a:srgbClr val="2F5597"/>
+            </a:solidFill>
+          </a:ln>
+        </p:spPr>
+        <p:style>
+          <a:lnRef idx="2">
+            <a:schemeClr val="accent1"/>
+          </a:lnRef>
+          <a:fillRef idx="0">
+            <a:schemeClr val="accent1"/>
+          </a:fillRef>
+          <a:effectRef idx="1">
+            <a:schemeClr val="accent1"/>
+          </a:effectRef>
+          <a:fontRef idx="minor">
+            <a:schemeClr val="tx1"/>
+          </a:fontRef>
+        </p:style>
+      </p:cxnSp>
+      <p:sp>
+        <p:nvSpPr>
+          <p:cNvPr id="26" name="Rounded Rectangle 25"/>
+          <p:cNvSpPr/>
+          <p:nvPr/>
+        </p:nvSpPr>
+        <p:spPr>
+          <a:xfrm>
+            <a:off x="1148346" y="4435485"/>
+            <a:ext cx="1315949" cy="552622"/>
+          </a:xfrm>
+          <a:prstGeom prst="roundRect">
+            <a:avLst>
+              <a:gd name="adj" fmla="val 50000"/>
+            </a:avLst>
+          </a:prstGeom>
+          <a:solidFill>
+            <a:srgbClr val="E3EEF9"/>
+          </a:solidFill>
+          <a:ln w="15875">
+            <a:solidFill>
+              <a:srgbClr val="2F5597"/>
+            </a:solidFill>
+          </a:ln>
+          <a:effectLst/>
+        </p:spPr>
+        <p:style>
+          <a:lnRef idx="1">
+            <a:schemeClr val="accent1"/>
+          </a:lnRef>
+          <a:fillRef idx="3">
+            <a:schemeClr val="accent1"/>
+          </a:fillRef>
+          <a:effectRef idx="2">
+            <a:schemeClr val="accent1"/>
+          </a:effectRef>
+          <a:fontRef idx="minor">
+            <a:schemeClr val="lt1"/>
+          </a:fontRef>
+        </p:style>
+        <p:txBody>
+          <a:bodyPr rtlCol="0" anchor="ctr" wrap="none" lIns="64000" rIns="64000" tIns="25400" bIns="25400"/>
+          <a:lstStyle/>
+          <a:p>
+            <a:pPr algn="ctr"/>
+            <a:r>
+              <a:rPr sz="1300" b="0">
+                <a:solidFill>
+                  <a:srgbClr val="000000"/>
+                </a:solidFill>
+                <a:latin typeface="Calibri"/>
+              </a:rPr>
+              <a:t>TC đứng: x =</a:t>
+            </a:r>
+          </a:p>
+          <a:p>
+            <a:pPr algn="ctr"/>
+            <a:r>
+              <a:rPr sz="1300" b="0">
+                <a:solidFill>
+                  <a:srgbClr val="000000"/>
+                </a:solidFill>
+                <a:latin typeface="Calibri"/>
+              </a:rPr>
+              <a:t>−d/c</a:t>
+            </a:r>
+          </a:p>
+        </p:txBody>
+      </p:sp>
+      <p:cxnSp>
+        <p:nvCxnSpPr>
+          <p:cNvPr id="27" name="Connector 26"/>
+          <p:cNvCxnSpPr/>
+          <p:nvPr/>
+        </p:nvCxnSpPr>
+        <p:spPr>
+          <a:xfrm flipH="1">
+            <a:off x="2507221" y="5238597"/>
+            <a:ext cx="1831667" cy="100711"/>
+          </a:xfrm>
+          <a:prstGeom prst="line">
+            <a:avLst/>
+          </a:prstGeom>
+          <a:ln w="15875">
+            <a:solidFill>
+              <a:srgbClr val="2F5597"/>
+            </a:solidFill>
+          </a:ln>
+        </p:spPr>
+        <p:style>
+          <a:lnRef idx="2">
+            <a:schemeClr val="accent1"/>
+          </a:lnRef>
+          <a:fillRef idx="0">
+            <a:schemeClr val="accent1"/>
+          </a:fillRef>
+          <a:effectRef idx="1">
+            <a:schemeClr val="accent1"/>
+          </a:effectRef>
+          <a:fontRef idx="minor">
+            <a:schemeClr val="tx1"/>
+          </a:fontRef>
+        </p:style>
+      </p:cxnSp>
+      <p:sp>
+        <p:nvSpPr>
+          <p:cNvPr id="28" name="Rounded Rectangle 27"/>
+          <p:cNvSpPr/>
+          <p:nvPr/>
+        </p:nvSpPr>
+        <p:spPr>
+          <a:xfrm>
+            <a:off x="1105420" y="5062997"/>
+            <a:ext cx="1401801" cy="552622"/>
+          </a:xfrm>
+          <a:prstGeom prst="roundRect">
+            <a:avLst>
+              <a:gd name="adj" fmla="val 50000"/>
+            </a:avLst>
+          </a:prstGeom>
+          <a:solidFill>
+            <a:srgbClr val="E3EEF9"/>
+          </a:solidFill>
+          <a:ln w="15875">
+            <a:solidFill>
+              <a:srgbClr val="2F5597"/>
+            </a:solidFill>
+          </a:ln>
+          <a:effectLst/>
+        </p:spPr>
+        <p:style>
+          <a:lnRef idx="1">
+            <a:schemeClr val="accent1"/>
+          </a:lnRef>
+          <a:fillRef idx="3">
+            <a:schemeClr val="accent1"/>
+          </a:fillRef>
+          <a:effectRef idx="2">
+            <a:schemeClr val="accent1"/>
+          </a:effectRef>
+          <a:fontRef idx="minor">
+            <a:schemeClr val="lt1"/>
+          </a:fontRef>
+        </p:style>
+        <p:txBody>
+          <a:bodyPr rtlCol="0" anchor="ctr" wrap="none" lIns="64000" rIns="64000" tIns="25400" bIns="25400"/>
+          <a:lstStyle/>
+          <a:p>
+            <a:pPr algn="ctr"/>
+            <a:r>
+              <a:rPr sz="1300" b="0">
+                <a:solidFill>
+                  <a:srgbClr val="000000"/>
+                </a:solidFill>
+                <a:latin typeface="Calibri"/>
+              </a:rPr>
+              <a:t>TC ngang: y =</a:t>
+            </a:r>
+          </a:p>
+          <a:p>
+            <a:pPr algn="ctr"/>
+            <a:r>
+              <a:rPr sz="1300" b="0">
+                <a:solidFill>
+                  <a:srgbClr val="000000"/>
+                </a:solidFill>
+                <a:latin typeface="Calibri"/>
+              </a:rPr>
+              <a:t>a/c</a:t>
+            </a:r>
+          </a:p>
+        </p:txBody>
+      </p:sp>
+      <p:cxnSp>
+        <p:nvCxnSpPr>
+          <p:cNvPr id="29" name="Connector 28"/>
+          <p:cNvCxnSpPr/>
+          <p:nvPr/>
+        </p:nvCxnSpPr>
+        <p:spPr>
+          <a:xfrm flipH="1">
+            <a:off x="2635999" y="5238597"/>
+            <a:ext cx="1702889" cy="627512"/>
+          </a:xfrm>
+          <a:prstGeom prst="line">
+            <a:avLst/>
+          </a:prstGeom>
+          <a:ln w="15875">
+            <a:solidFill>
+              <a:srgbClr val="2F5597"/>
+            </a:solidFill>
+          </a:ln>
+        </p:spPr>
+        <p:style>
+          <a:lnRef idx="2">
+            <a:schemeClr val="accent1"/>
+          </a:lnRef>
+          <a:fillRef idx="0">
+            <a:schemeClr val="accent1"/>
+          </a:fillRef>
+          <a:effectRef idx="1">
+            <a:schemeClr val="accent1"/>
+          </a:effectRef>
+          <a:fontRef idx="minor">
+            <a:schemeClr val="tx1"/>
+          </a:fontRef>
+        </p:style>
+      </p:cxnSp>
+      <p:sp>
+        <p:nvSpPr>
+          <p:cNvPr id="30" name="Rounded Rectangle 29"/>
+          <p:cNvSpPr/>
+          <p:nvPr/>
+        </p:nvSpPr>
+        <p:spPr>
+          <a:xfrm>
+            <a:off x="976642" y="5690509"/>
+            <a:ext cx="1659357" cy="351200"/>
+          </a:xfrm>
+          <a:prstGeom prst="roundRect">
+            <a:avLst>
+              <a:gd name="adj" fmla="val 50000"/>
+            </a:avLst>
+          </a:prstGeom>
+          <a:solidFill>
+            <a:srgbClr val="E3EEF9"/>
+          </a:solidFill>
+          <a:ln w="15875">
+            <a:solidFill>
+              <a:srgbClr val="2F5597"/>
+            </a:solidFill>
+          </a:ln>
+          <a:effectLst/>
+        </p:spPr>
+        <p:style>
+          <a:lnRef idx="1">
+            <a:schemeClr val="accent1"/>
+          </a:lnRef>
+          <a:fillRef idx="3">
+            <a:schemeClr val="accent1"/>
+          </a:fillRef>
+          <a:effectRef idx="2">
+            <a:schemeClr val="accent1"/>
+          </a:effectRef>
+          <a:fontRef idx="minor">
+            <a:schemeClr val="lt1"/>
+          </a:fontRef>
+        </p:style>
+        <p:txBody>
+          <a:bodyPr rtlCol="0" anchor="ctr" wrap="none" lIns="64000" rIns="64000" tIns="25400" bIns="25400"/>
+          <a:lstStyle/>
+          <a:p>
+            <a:pPr algn="ctr"/>
+            <a:r>
+              <a:rPr sz="1300" b="0">
+                <a:solidFill>
+                  <a:srgbClr val="000000"/>
+                </a:solidFill>
+                <a:latin typeface="Calibri"/>
+              </a:rPr>
+              <a:t>Không có cực trị</a:t>
+            </a:r>
+          </a:p>
+        </p:txBody>
+      </p:sp>
+      <p:sp>
+        <p:nvSpPr>
+          <p:cNvPr id="31" name="Oval 30"/>
+          <p:cNvSpPr/>
+          <p:nvPr/>
+        </p:nvSpPr>
+        <p:spPr>
+          <a:xfrm>
+            <a:off x="3155896" y="4826713"/>
+            <a:ext cx="2365985" cy="823767"/>
+          </a:xfrm>
+          <a:prstGeom prst="ellipse">
+            <a:avLst/>
+          </a:prstGeom>
+          <a:solidFill>
+            <a:srgbClr val="E2EFDA"/>
+          </a:solidFill>
+          <a:ln w="31750">
+            <a:solidFill>
+              <a:srgbClr val="375623"/>
+            </a:solidFill>
+          </a:ln>
+          <a:effectLst/>
+        </p:spPr>
+        <p:style>
+          <a:lnRef idx="1">
+            <a:schemeClr val="accent1"/>
+          </a:lnRef>
+          <a:fillRef idx="3">
+            <a:schemeClr val="accent1"/>
+          </a:fillRef>
+          <a:effectRef idx="2">
+            <a:schemeClr val="accent1"/>
+          </a:effectRef>
+          <a:fontRef idx="minor">
+            <a:schemeClr val="lt1"/>
+          </a:fontRef>
+        </p:style>
+        <p:txBody>
+          <a:bodyPr rtlCol="0" anchor="ctr" wrap="none" lIns="64000" rIns="64000" tIns="25400" bIns="25400"/>
+          <a:lstStyle/>
+          <a:p>
+            <a:pPr algn="ctr"/>
+            <a:r>
+              <a:rPr sz="1500" b="1">
+                <a:solidFill>
+                  <a:srgbClr val="000000"/>
+                </a:solidFill>
+                <a:latin typeface="Calibri"/>
+              </a:rPr>
+              <a:t>Phân thức y</a:t>
+            </a:r>
+          </a:p>
+          <a:p>
+            <a:pPr algn="ctr"/>
+            <a:r>
+              <a:rPr sz="1500" b="1">
+                <a:solidFill>
+                  <a:srgbClr val="000000"/>
+                </a:solidFill>
+                <a:latin typeface="Calibri"/>
+              </a:rPr>
+              <a:t>= (ax+b)/(cx+d)</a:t>
+            </a:r>
+          </a:p>
+        </p:txBody>
+      </p:sp>
+      <p:cxnSp>
+        <p:nvCxnSpPr>
+          <p:cNvPr id="32" name="Connector 31"/>
+          <p:cNvCxnSpPr/>
+          <p:nvPr/>
+        </p:nvCxnSpPr>
+        <p:spPr>
+          <a:xfrm>
+            <a:off x="6027267" y="3954780"/>
+            <a:ext cx="1688379" cy="1283817"/>
+          </a:xfrm>
+          <a:prstGeom prst="line">
+            <a:avLst/>
+          </a:prstGeom>
+          <a:ln w="44450">
+            <a:solidFill>
+              <a:srgbClr val="7030A0"/>
+            </a:solidFill>
+          </a:ln>
+        </p:spPr>
+        <p:style>
+          <a:lnRef idx="2">
+            <a:schemeClr val="accent1"/>
+          </a:lnRef>
+          <a:fillRef idx="0">
+            <a:schemeClr val="accent1"/>
+          </a:fillRef>
+          <a:effectRef idx="1">
+            <a:schemeClr val="accent1"/>
+          </a:effectRef>
+          <a:fontRef idx="minor">
+            <a:schemeClr val="tx1"/>
+          </a:fontRef>
+        </p:style>
+      </p:cxnSp>
+      <p:cxnSp>
+        <p:nvCxnSpPr>
+          <p:cNvPr id="33" name="Connector 32"/>
+          <p:cNvCxnSpPr/>
+          <p:nvPr/>
+        </p:nvCxnSpPr>
+        <p:spPr>
+          <a:xfrm flipV="1">
+            <a:off x="7715646" y="4611085"/>
+            <a:ext cx="1874593" cy="627512"/>
+          </a:xfrm>
+          <a:prstGeom prst="line">
+            <a:avLst/>
+          </a:prstGeom>
+          <a:ln w="15875">
+            <a:solidFill>
+              <a:srgbClr val="7030A0"/>
+            </a:solidFill>
+          </a:ln>
+        </p:spPr>
+        <p:style>
+          <a:lnRef idx="2">
+            <a:schemeClr val="accent1"/>
+          </a:lnRef>
+          <a:fillRef idx="0">
+            <a:schemeClr val="accent1"/>
+          </a:fillRef>
+          <a:effectRef idx="1">
+            <a:schemeClr val="accent1"/>
+          </a:effectRef>
+          <a:fontRef idx="minor">
+            <a:schemeClr val="tx1"/>
+          </a:fontRef>
+        </p:style>
+      </p:cxnSp>
+      <p:sp>
+        <p:nvSpPr>
+          <p:cNvPr id="34" name="Rounded Rectangle 33"/>
+          <p:cNvSpPr/>
+          <p:nvPr/>
+        </p:nvSpPr>
+        <p:spPr>
+          <a:xfrm>
+            <a:off x="9590239" y="4334774"/>
+            <a:ext cx="1315949" cy="552622"/>
+          </a:xfrm>
+          <a:prstGeom prst="roundRect">
+            <a:avLst>
+              <a:gd name="adj" fmla="val 50000"/>
+            </a:avLst>
+          </a:prstGeom>
+          <a:solidFill>
+            <a:srgbClr val="F3E8F7"/>
+          </a:solidFill>
+          <a:ln w="15875">
+            <a:solidFill>
+              <a:srgbClr val="7030A0"/>
+            </a:solidFill>
+          </a:ln>
+          <a:effectLst/>
+        </p:spPr>
+        <p:style>
+          <a:lnRef idx="1">
+            <a:schemeClr val="accent1"/>
+          </a:lnRef>
+          <a:fillRef idx="3">
+            <a:schemeClr val="accent1"/>
+          </a:fillRef>
+          <a:effectRef idx="2">
+            <a:schemeClr val="accent1"/>
+          </a:effectRef>
+          <a:fontRef idx="minor">
+            <a:schemeClr val="lt1"/>
+          </a:fontRef>
+        </p:style>
+        <p:txBody>
+          <a:bodyPr rtlCol="0" anchor="ctr" wrap="none" lIns="64000" rIns="64000" tIns="25400" bIns="25400"/>
+          <a:lstStyle/>
+          <a:p>
+            <a:pPr algn="ctr"/>
+            <a:r>
+              <a:rPr sz="1300" b="0">
+                <a:solidFill>
+                  <a:srgbClr val="000000"/>
+                </a:solidFill>
+                <a:latin typeface="Calibri"/>
+              </a:rPr>
+              <a:t>TC đứng: x =</a:t>
+            </a:r>
+          </a:p>
+          <a:p>
+            <a:pPr algn="ctr"/>
+            <a:r>
+              <a:rPr sz="1300" b="0">
+                <a:solidFill>
+                  <a:srgbClr val="000000"/>
+                </a:solidFill>
+                <a:latin typeface="Calibri"/>
+              </a:rPr>
+              <a:t>−q/p</a:t>
+            </a:r>
+          </a:p>
+        </p:txBody>
+      </p:sp>
+      <p:cxnSp>
+        <p:nvCxnSpPr>
+          <p:cNvPr id="35" name="Connector 34"/>
+          <p:cNvCxnSpPr/>
+          <p:nvPr/>
+        </p:nvCxnSpPr>
+        <p:spPr>
+          <a:xfrm>
+            <a:off x="7715646" y="5238597"/>
+            <a:ext cx="1702889" cy="0"/>
+          </a:xfrm>
+          <a:prstGeom prst="line">
+            <a:avLst/>
+          </a:prstGeom>
+          <a:ln w="15875">
+            <a:solidFill>
+              <a:srgbClr val="7030A0"/>
+            </a:solidFill>
+          </a:ln>
+        </p:spPr>
+        <p:style>
+          <a:lnRef idx="2">
+            <a:schemeClr val="accent1"/>
+          </a:lnRef>
+          <a:fillRef idx="0">
+            <a:schemeClr val="accent1"/>
+          </a:fillRef>
+          <a:effectRef idx="1">
+            <a:schemeClr val="accent1"/>
+          </a:effectRef>
+          <a:fontRef idx="minor">
+            <a:schemeClr val="tx1"/>
+          </a:fontRef>
+        </p:style>
+      </p:cxnSp>
+      <p:sp>
+        <p:nvSpPr>
+          <p:cNvPr id="36" name="Rounded Rectangle 35"/>
+          <p:cNvSpPr/>
+          <p:nvPr/>
+        </p:nvSpPr>
+        <p:spPr>
+          <a:xfrm>
+            <a:off x="9418535" y="4962286"/>
+            <a:ext cx="1659357" cy="552622"/>
+          </a:xfrm>
+          <a:prstGeom prst="roundRect">
+            <a:avLst>
+              <a:gd name="adj" fmla="val 50000"/>
+            </a:avLst>
+          </a:prstGeom>
+          <a:solidFill>
+            <a:srgbClr val="F3E8F7"/>
+          </a:solidFill>
+          <a:ln w="15875">
+            <a:solidFill>
+              <a:srgbClr val="7030A0"/>
+            </a:solidFill>
+          </a:ln>
+          <a:effectLst/>
+        </p:spPr>
+        <p:style>
+          <a:lnRef idx="1">
+            <a:schemeClr val="accent1"/>
+          </a:lnRef>
+          <a:fillRef idx="3">
+            <a:schemeClr val="accent1"/>
+          </a:fillRef>
+          <a:effectRef idx="2">
+            <a:schemeClr val="accent1"/>
+          </a:effectRef>
+          <a:fontRef idx="minor">
+            <a:schemeClr val="lt1"/>
+          </a:fontRef>
+        </p:style>
+        <p:txBody>
+          <a:bodyPr rtlCol="0" anchor="ctr" wrap="none" lIns="64000" rIns="64000" tIns="25400" bIns="25400"/>
+          <a:lstStyle/>
+          <a:p>
+            <a:pPr algn="ctr"/>
+            <a:r>
+              <a:rPr sz="1300" b="0">
+                <a:solidFill>
+                  <a:srgbClr val="000000"/>
+                </a:solidFill>
+                <a:latin typeface="Calibri"/>
+              </a:rPr>
+              <a:t>TC xiên: chia đa</a:t>
+            </a:r>
+          </a:p>
+          <a:p>
+            <a:pPr algn="ctr"/>
+            <a:r>
+              <a:rPr sz="1300" b="0">
+                <a:solidFill>
+                  <a:srgbClr val="000000"/>
+                </a:solidFill>
+                <a:latin typeface="Calibri"/>
+              </a:rPr>
+              <a:t>thức</a:t>
+            </a:r>
+          </a:p>
+        </p:txBody>
+      </p:sp>
+      <p:cxnSp>
+        <p:nvCxnSpPr>
+          <p:cNvPr id="37" name="Connector 36"/>
+          <p:cNvCxnSpPr/>
+          <p:nvPr/>
+        </p:nvCxnSpPr>
+        <p:spPr>
+          <a:xfrm>
+            <a:off x="7715646" y="5238597"/>
+            <a:ext cx="1831667" cy="627512"/>
+          </a:xfrm>
+          <a:prstGeom prst="line">
+            <a:avLst/>
+          </a:prstGeom>
+          <a:ln w="15875">
+            <a:solidFill>
+              <a:srgbClr val="7030A0"/>
+            </a:solidFill>
+          </a:ln>
+        </p:spPr>
+        <p:style>
+          <a:lnRef idx="2">
+            <a:schemeClr val="accent1"/>
+          </a:lnRef>
+          <a:fillRef idx="0">
+            <a:schemeClr val="accent1"/>
+          </a:fillRef>
+          <a:effectRef idx="1">
+            <a:schemeClr val="accent1"/>
+          </a:effectRef>
+          <a:fontRef idx="minor">
+            <a:schemeClr val="tx1"/>
+          </a:fontRef>
+        </p:style>
+      </p:cxnSp>
+      <p:sp>
+        <p:nvSpPr>
+          <p:cNvPr id="38" name="Rounded Rectangle 37"/>
+          <p:cNvSpPr/>
+          <p:nvPr/>
+        </p:nvSpPr>
+        <p:spPr>
+          <a:xfrm>
+            <a:off x="9547313" y="5589798"/>
+            <a:ext cx="1401801" cy="552622"/>
+          </a:xfrm>
+          <a:prstGeom prst="roundRect">
+            <a:avLst>
+              <a:gd name="adj" fmla="val 50000"/>
+            </a:avLst>
+          </a:prstGeom>
+          <a:solidFill>
+            <a:srgbClr val="F3E8F7"/>
+          </a:solidFill>
+          <a:ln w="15875">
+            <a:solidFill>
+              <a:srgbClr val="7030A0"/>
+            </a:solidFill>
+          </a:ln>
+          <a:effectLst/>
+        </p:spPr>
+        <p:style>
+          <a:lnRef idx="1">
+            <a:schemeClr val="accent1"/>
+          </a:lnRef>
+          <a:fillRef idx="3">
+            <a:schemeClr val="accent1"/>
+          </a:fillRef>
+          <a:effectRef idx="2">
+            <a:schemeClr val="accent1"/>
+          </a:effectRef>
+          <a:fontRef idx="minor">
+            <a:schemeClr val="lt1"/>
+          </a:fontRef>
+        </p:style>
+        <p:txBody>
+          <a:bodyPr rtlCol="0" anchor="ctr" wrap="none" lIns="64000" rIns="64000" tIns="25400" bIns="25400"/>
+          <a:lstStyle/>
+          <a:p>
+            <a:pPr algn="ctr"/>
+            <a:r>
+              <a:rPr sz="1300" b="0">
+                <a:solidFill>
+                  <a:srgbClr val="000000"/>
+                </a:solidFill>
+                <a:latin typeface="Calibri"/>
+              </a:rPr>
+              <a:t>Có thể có cực</a:t>
+            </a:r>
+          </a:p>
+          <a:p>
+            <a:pPr algn="ctr"/>
+            <a:r>
+              <a:rPr sz="1300" b="0">
+                <a:solidFill>
+                  <a:srgbClr val="000000"/>
+                </a:solidFill>
+                <a:latin typeface="Calibri"/>
+              </a:rPr>
+              <a:t>trị</a:t>
+            </a:r>
+          </a:p>
+        </p:txBody>
+      </p:sp>
+      <p:sp>
+        <p:nvSpPr>
+          <p:cNvPr id="39" name="Oval 38"/>
+          <p:cNvSpPr/>
+          <p:nvPr/>
+        </p:nvSpPr>
+        <p:spPr>
+          <a:xfrm>
+            <a:off x="6255285" y="4826713"/>
+            <a:ext cx="2920721" cy="823767"/>
+          </a:xfrm>
+          <a:prstGeom prst="ellipse">
+            <a:avLst/>
+          </a:prstGeom>
+          <a:solidFill>
+            <a:srgbClr val="FFF2CC"/>
+          </a:solidFill>
+          <a:ln w="31750">
+            <a:solidFill>
+              <a:srgbClr val="BF8F00"/>
+            </a:solidFill>
+          </a:ln>
+          <a:effectLst/>
+        </p:spPr>
+        <p:style>
+          <a:lnRef idx="1">
+            <a:schemeClr val="accent1"/>
+          </a:lnRef>
+          <a:fillRef idx="3">
+            <a:schemeClr val="accent1"/>
+          </a:fillRef>
+          <a:effectRef idx="2">
+            <a:schemeClr val="accent1"/>
+          </a:effectRef>
+          <a:fontRef idx="minor">
+            <a:schemeClr val="lt1"/>
+          </a:fontRef>
+        </p:style>
+        <p:txBody>
+          <a:bodyPr rtlCol="0" anchor="ctr" wrap="none" lIns="64000" rIns="64000" tIns="25400" bIns="25400"/>
+          <a:lstStyle/>
+          <a:p>
+            <a:pPr algn="ctr"/>
+            <a:r>
+              <a:rPr sz="1500" b="1">
+                <a:solidFill>
+                  <a:srgbClr val="000000"/>
+                </a:solidFill>
+                <a:latin typeface="Calibri"/>
+              </a:rPr>
+              <a:t>Phân thức y</a:t>
+            </a:r>
+          </a:p>
+          <a:p>
+            <a:pPr algn="ctr"/>
+            <a:r>
+              <a:rPr sz="1500" b="1">
+                <a:solidFill>
+                  <a:srgbClr val="000000"/>
+                </a:solidFill>
+                <a:latin typeface="Calibri"/>
+              </a:rPr>
+              <a:t>= (ax²+bx+c)/(px+q)</a:t>
+            </a:r>
+          </a:p>
+        </p:txBody>
+      </p:sp>
+      <p:sp>
+        <p:nvSpPr>
+          <p:cNvPr id="40" name="Oval 39"/>
+          <p:cNvSpPr/>
+          <p:nvPr/>
+        </p:nvSpPr>
+        <p:spPr>
+          <a:xfrm>
+            <a:off x="4941353" y="3484793"/>
+            <a:ext cx="2171828" cy="939972"/>
+          </a:xfrm>
+          <a:prstGeom prst="ellipse">
+            <a:avLst/>
+          </a:prstGeom>
+          <a:solidFill>
+            <a:srgbClr val="002060"/>
+          </a:solidFill>
+          <a:ln w="25400">
+            <a:solidFill>
+              <a:srgbClr val="000B1E"/>
+            </a:solidFill>
+          </a:ln>
+          <a:effectLst/>
+        </p:spPr>
+        <p:style>
+          <a:lnRef idx="1">
+            <a:schemeClr val="accent1"/>
+          </a:lnRef>
+          <a:fillRef idx="3">
+            <a:schemeClr val="accent1"/>
+          </a:fillRef>
+          <a:effectRef idx="2">
+            <a:schemeClr val="accent1"/>
+          </a:effectRef>
+          <a:fontRef idx="minor">
+            <a:schemeClr val="lt1"/>
+          </a:fontRef>
+        </p:style>
+        <p:txBody>
+          <a:bodyPr rtlCol="0" anchor="ctr" wrap="none" lIns="64000" rIns="64000" tIns="25400" bIns="25400"/>
+          <a:lstStyle/>
+          <a:p>
+            <a:pPr algn="ctr"/>
+            <a:r>
+              <a:rPr sz="1700" b="1">
+                <a:solidFill>
+                  <a:srgbClr val="FFFFFF"/>
+                </a:solidFill>
+                <a:latin typeface="Calibri"/>
+              </a:rPr>
+              <a:t>KHẢO SÁT HÀM</a:t>
+            </a:r>
+          </a:p>
+          <a:p>
+            <a:pPr algn="ctr"/>
+            <a:r>
+              <a:rPr sz="1700" b="1">
+                <a:solidFill>
+                  <a:srgbClr val="FFFFFF"/>
+                </a:solidFill>
+                <a:latin typeface="Calibri"/>
+              </a:rPr>
+              <a:t>SỐ</a:t>
             </a:r>
           </a:p>
         </p:txBody>
